--- a/assets/powerpoints/module-n2-panier/C1-la-question-courte.pptx
+++ b/assets/powerpoints/module-n2-panier/C1-la-question-courte.pptx
@@ -11455,7 +11455,61 @@
                 </a:solidFill>
                 <a:latin typeface="Verdana"/>
               </a:rPr>
-              <a:t>C'est la forme la plus simple du français parlé, et elle est tout à fait correcte : « C'est &lt;b&gt;combien&lt;/b&gt; ? », « C'est &lt;b&gt;où&lt;/b&gt; ? », « C'est &lt;b&gt;quel format&lt;/b&gt; ? ». Personne ne la corrigera.</a:t>
+              <a:t>C'est la forme la plus simple du français parlé, et elle est tout à fait correcte : « C'est </a:t>
+            </a:r>
+            <a:r>
+              <a:rPr sz="2000" b="1" i="0">
+                <a:solidFill>
+                  <a:srgbClr val="4B4F52"/>
+                </a:solidFill>
+                <a:latin typeface="Verdana"/>
+              </a:rPr>
+              <a:t>combien</a:t>
+            </a:r>
+            <a:r>
+              <a:rPr sz="2000" b="0" i="0">
+                <a:solidFill>
+                  <a:srgbClr val="4B4F52"/>
+                </a:solidFill>
+                <a:latin typeface="Verdana"/>
+              </a:rPr>
+              <a:t> ? », « C'est </a:t>
+            </a:r>
+            <a:r>
+              <a:rPr sz="2000" b="1" i="0">
+                <a:solidFill>
+                  <a:srgbClr val="4B4F52"/>
+                </a:solidFill>
+                <a:latin typeface="Verdana"/>
+              </a:rPr>
+              <a:t>où</a:t>
+            </a:r>
+            <a:r>
+              <a:rPr sz="2000" b="0" i="0">
+                <a:solidFill>
+                  <a:srgbClr val="4B4F52"/>
+                </a:solidFill>
+                <a:latin typeface="Verdana"/>
+              </a:rPr>
+              <a:t> ? », « C'est </a:t>
+            </a:r>
+            <a:r>
+              <a:rPr sz="2000" b="1" i="0">
+                <a:solidFill>
+                  <a:srgbClr val="4B4F52"/>
+                </a:solidFill>
+                <a:latin typeface="Verdana"/>
+              </a:rPr>
+              <a:t>quel format</a:t>
+            </a:r>
+            <a:r>
+              <a:rPr sz="2000" b="0" i="0">
+                <a:solidFill>
+                  <a:srgbClr val="4B4F52"/>
+                </a:solidFill>
+                <a:latin typeface="Verdana"/>
+              </a:rPr>
+              <a:t> ? ». Personne ne la corrigera.</a:t>
             </a:r>
           </a:p>
         </p:txBody>
@@ -12004,7 +12058,25 @@
                 </a:solidFill>
                 <a:latin typeface="Verdana"/>
               </a:rPr>
-              <a:t>Quand on n'est pas compris, le réflexe est de hausser la voix. Ce n'est presque jamais le volume qui manque : c'est la vitesse. La bonne phrase est « &lt;b&gt;plus lentement, s'il vous plaît&lt;/b&gt; », et elle vaut dans les deux sens.</a:t>
+              <a:t>Quand on n'est pas compris, le réflexe est de hausser la voix. Ce n'est presque jamais le volume qui manque : c'est la vitesse. La bonne phrase est « </a:t>
+            </a:r>
+            <a:r>
+              <a:rPr sz="2000" b="1" i="0">
+                <a:solidFill>
+                  <a:srgbClr val="4B4F52"/>
+                </a:solidFill>
+                <a:latin typeface="Verdana"/>
+              </a:rPr>
+              <a:t>plus lentement, s'il vous plaît</a:t>
+            </a:r>
+            <a:r>
+              <a:rPr sz="2000" b="0" i="0">
+                <a:solidFill>
+                  <a:srgbClr val="4B4F52"/>
+                </a:solidFill>
+                <a:latin typeface="Verdana"/>
+              </a:rPr>
+              <a:t> », et elle vaut dans les deux sens.</a:t>
             </a:r>
           </a:p>
         </p:txBody>
